--- a/lectures/Lecture 5.2 - Talking to Your Server.pptx
+++ b/lectures/Lecture 5.2 - Talking to Your Server.pptx
@@ -989,7 +989,7 @@
             </a:pPr>
             <a:r>
               <a:rPr lang="en-US"/>
-              <a:t>Three states, three words. Students should be able to draw the little state diagram in their heads - pending going either to fulfilled or to rejected, and that's really it. The transition happens ONCE...a settled promise can't go back to pending, which is kinda the whole reason promises are easier to reason about than raw callbacks.</a:t>
+              <a:t>They should be able to draw this little state diagram in their heads - pending goes to either fulfilled or rejected, and that's really the whole thing. The transition happens ONCE...a settled promise can't go back to pending, which is kinda the whole reason promises are easier to reason about than raw callbacks.</a:t>
             </a:r>
             <a:endParaRPr/>
           </a:p>
@@ -1895,7 +1895,7 @@
             </a:pPr>
             <a:r>
               <a:rPr lang="en-US"/>
-              <a:t>The readable syntax. Three rules, a side-by-side, and a clarification about what await actually does under the hood, which is the thing students most often get wrong.</a:t>
+              <a:t>The readable syntax. A handful of rules, a side-by-side, and then a clarification about what await is actually doing underneath, which is the thing students most often get wrong.</a:t>
             </a:r>
             <a:endParaRPr/>
           </a:p>
@@ -2046,7 +2046,7 @@
             </a:pPr>
             <a:r>
               <a:rPr lang="en-US"/>
-              <a:t>Memorize the three rules. Really most of the confusion around async/await comes from quietly violating one of them, and the most common mistake by far is forgetting rule 3 - trying to await something in a function that wasn't declared async. The error message when you do this is actually pretty clear, which is kinda rare in JavaScript, so push your coding agent to read it instead of guessing.</a:t>
+              <a:t>These rules are worth memorizing, because most of the confusion around async/await comes from quietly violating one of them - and the most common mistake by a mile is forgetting rule 3 and trying to await something inside a function that was never declared async. The error message when you do this is actually pretty clear, which is kinda rare in JavaScript, so push your coding agent to read it instead of guessing.</a:t>
             </a:r>
             <a:endParaRPr/>
           </a:p>
@@ -2392,7 +2392,7 @@
             </a:pPr>
             <a:r>
               <a:rPr lang="en-US"/>
-              <a:t>Memorize the three rules. Really most of the confusion around async/await comes from quietly violating one of them, and the most common mistake by far is forgetting rule 3 - trying to await something in a function that wasn't declared async. The error message when you do this is actually pretty clear, which is kinda rare in JavaScript, so push your coding agent to read it instead of guessing.</a:t>
+              <a:t>These rules are worth memorizing, because most of the confusion around async/await comes from quietly violating one of them - and the most common mistake by a mile is forgetting rule 3 and trying to await something inside a function that was never declared async. The error message when you do this is actually pretty clear, which is kinda rare in JavaScript, so push your coding agent to read it instead of guessing.</a:t>
             </a:r>
             <a:endParaRPr/>
           </a:p>
@@ -2738,7 +2738,7 @@
             </a:pPr>
             <a:r>
               <a:rPr lang="en-US"/>
-              <a:t>Memorize the three rules. Really most of the confusion around async/await comes from quietly violating one of them, and the most common mistake by far is forgetting rule 3 - trying to await something in a function that wasn't declared async. The error message when you do this is actually pretty clear, which is kinda rare in JavaScript, so push your coding agent to read it instead of guessing.</a:t>
+              <a:t>These rules are worth memorizing, because most of the confusion around async/await comes from quietly violating one of them - and the most common mistake by a mile is forgetting rule 3 and trying to await something inside a function that was never declared async. The error message when you do this is actually pretty clear, which is kinda rare in JavaScript, so push your coding agent to read it instead of guessing.</a:t>
             </a:r>
             <a:endParaRPr/>
           </a:p>
@@ -4743,7 +4743,7 @@
             </a:pPr>
             <a:r>
               <a:rPr lang="en-US"/>
-              <a:t>Frame the problem before you introduce any syntax. Students who don't feel the problem won't appreciate the solution.</a:t>
+              <a:t>Frame the problem before any syntax shows up, because a student who hasn't felt the problem has no reason to care about the solution.</a:t>
             </a:r>
             <a:endParaRPr/>
           </a:p>
@@ -5298,7 +5298,7 @@
             </a:pPr>
             <a:r>
               <a:rPr lang="en-US"/>
-              <a:t>Students naturally think 'network error equals exception' and stop there, which is how you end up with code that silently ignores a 500 and tries to parse an error page as JSON. Making them name three distinct failure modes is what gets them to write code that actually handles them instead of just hoping.</a:t>
+              <a:t>Students naturally think 'network error equals exception' and stop there, which is how you end up with code that silently ignores a 500 and tries to parse an error page as JSON. Making them name each failure mode out loud is what gets them writing code that handles the things, rather than code that hopes.</a:t>
             </a:r>
             <a:endParaRPr/>
           </a:p>
@@ -5449,7 +5449,7 @@
             </a:pPr>
             <a:r>
               <a:rPr lang="en-US"/>
-              <a:t>Students naturally think 'network error equals exception' and stop there, which is how you end up with code that silently ignores a 500 and tries to parse an error page as JSON. Making them name three distinct failure modes is what gets them to write code that actually handles them instead of just hoping.</a:t>
+              <a:t>Students naturally think 'network error equals exception' and stop there, which is how you end up with code that silently ignores a 500 and tries to parse an error page as JSON. Making them name each failure mode out loud is what gets them writing code that handles the things, rather than code that hopes.</a:t>
             </a:r>
             <a:endParaRPr/>
           </a:p>
@@ -6204,7 +6204,7 @@
             </a:pPr>
             <a:r>
               <a:rPr lang="en-US"/>
-              <a:t>AbortController is the modern, idiomatic answer. It's also EXACTLY the pattern React's useEffect cleanup uses, which is a really nice forward-reference for next class - when they see useEffect returning a cleanup function, they'll recognize this. Walk through it: each new call aborts the previous controller, makes a fresh one, passes the signal into fetch, and the catch ignores AbortError because that rejection was on purpose. The alternative pattern (track a request id and ignore stale responses) works too, but AbortController also saves the network round trip, so it wins on both correctness AND efficiency.</a:t>
+              <a:t>AbortController is the modern, idiomatic answer. It's also EXACTLY the pattern React's useEffect cleanup uses, which is a really nice forward-reference for next class - when they see useEffect returning a cleanup function, they'll recognize this. Walk through it: each new call aborts the previous controller, makes a fresh one, passes the signal into fetch, and the catch ignores AbortError because that rejection was on purpose. The alternative pattern, where you track a request id and ignore the stale responses, works fine too - AbortController just also saves you the network round trip on the way.</a:t>
             </a:r>
             <a:endParaRPr/>
           </a:p>
@@ -6355,7 +6355,7 @@
             </a:pPr>
             <a:r>
               <a:rPr lang="en-US"/>
-              <a:t>AbortController is the modern, idiomatic answer. It's also EXACTLY the pattern React's useEffect cleanup uses, which is a really nice forward-reference for next class - when they see useEffect returning a cleanup function, they'll recognize this. Walk through it: each new call aborts the previous controller, makes a fresh one, passes the signal into fetch, and the catch ignores AbortError because that rejection was on purpose. The alternative pattern (track a request id and ignore stale responses) works too, but AbortController also saves the network round trip, so it wins on both correctness AND efficiency.</a:t>
+              <a:t>AbortController is the modern, idiomatic answer. It's also EXACTLY the pattern React's useEffect cleanup uses, which is a really nice forward-reference for next class - when they see useEffect returning a cleanup function, they'll recognize this. Walk through it: each new call aborts the previous controller, makes a fresh one, passes the signal into fetch, and the catch ignores AbortError because that rejection was on purpose. The alternative pattern, where you track a request id and ignore the stale responses, works fine too - AbortController just also saves you the network round trip on the way.</a:t>
             </a:r>
             <a:endParaRPr/>
           </a:p>
@@ -6657,7 +6657,7 @@
             </a:pPr>
             <a:r>
               <a:rPr lang="en-US"/>
-              <a:t>AbortController is the modern, idiomatic answer. It's also EXACTLY the pattern React's useEffect cleanup uses, which is a really nice forward-reference for next class - when they see useEffect returning a cleanup function, they'll recognize this. Walk through it: each new call aborts the previous controller, makes a fresh one, passes the signal into fetch, and the catch ignores AbortError because that rejection was on purpose. The alternative pattern (track a request id and ignore stale responses) works too, but AbortController also saves the network round trip, so it wins on both correctness AND efficiency.</a:t>
+              <a:t>AbortController is the modern, idiomatic answer. It's also EXACTLY the pattern React's useEffect cleanup uses, which is a really nice forward-reference for next class - when they see useEffect returning a cleanup function, they'll recognize this. Walk through it: each new call aborts the previous controller, makes a fresh one, passes the signal into fetch, and the catch ignores AbortError because that rejection was on purpose. The alternative pattern, where you track a request id and ignore the stale responses, works fine too - AbortController just also saves you the network round trip on the way.</a:t>
             </a:r>
             <a:endParaRPr/>
           </a:p>
@@ -7616,7 +7616,7 @@
             </a:pPr>
             <a:r>
               <a:rPr lang="en-US"/>
-              <a:t>Summary, recap, forward reference. Five takeaways - students should be able to recite all five from memory by the end of class. The AbortController pattern from Section 6 is also the exact shape of useEffect cleanup, which is the strongest forward reference into 6.1: when they see a useEffect that returns a cleanup function, that's the same machinery they just learned. The re-render question is the OTHER hook for React - it's the ONE thing they had to solve manually today (just 'append an li' in the exercises), and React's whole value proposition is kinda doing that for you automatically.</a:t>
+              <a:t>Summary, recap, forward reference. The takeaways here are the ones they should be able to recite back at me by the end of class. The AbortController pattern from Section 6 is also the exact shape of useEffect cleanup, which is the strongest forward reference into 6.1: when they see a useEffect that returns a cleanup function, that's the same machinery they just learned. The re-render question is the OTHER hook for React - it's the ONE thing they had to solve manually today (just 'append an li' in the exercises), and React's whole value proposition is kinda doing that for you automatically.</a:t>
             </a:r>
             <a:endParaRPr/>
           </a:p>
@@ -7918,7 +7918,7 @@
             </a:pPr>
             <a:r>
               <a:rPr lang="en-US"/>
-              <a:t>Summary, recap, forward reference. Five takeaways - students should be able to recite all five from memory by the end of class. The AbortController pattern from Section 6 is also the exact shape of useEffect cleanup, which is the strongest forward reference into 6.1: when they see a useEffect that returns a cleanup function, that's the same machinery they just learned. The re-render question is the OTHER hook for React - it's the ONE thing they had to solve manually today (just 'append an li' in the exercises), and React's whole value proposition is kinda doing that for you automatically.</a:t>
+              <a:t>Summary, recap, forward reference. The takeaways here are the ones they should be able to recite back at me by the end of class. The AbortController pattern from Section 6 is also the exact shape of useEffect cleanup, which is the strongest forward reference into 6.1: when they see a useEffect that returns a cleanup function, that's the same machinery they just learned. The re-render question is the OTHER hook for React - it's the ONE thing they had to solve manually today (just 'append an li' in the exercises), and React's whole value proposition is kinda doing that for you automatically.</a:t>
             </a:r>
             <a:endParaRPr/>
           </a:p>

--- a/lectures/Lecture 5.2 - Talking to Your Server.pptx
+++ b/lectures/Lecture 5.2 - Talking to Your Server.pptx
@@ -978,20 +978,9 @@
           </a:bodyPr>
           <a:lstStyle/>
           <a:p>
-            <a:pPr indent="0" lvl="0" marL="0" rtl="0" algn="l">
-              <a:spcBef>
-                <a:spcPts val="0"/>
-              </a:spcBef>
-              <a:spcAft>
-                <a:spcPts val="0"/>
-              </a:spcAft>
-              <a:buNone/>
-            </a:pPr>
-            <a:r>
-              <a:rPr lang="en-US"/>
-              <a:t>They should be able to draw this little state diagram in their heads - pending goes to either fulfilled or rejected, and that's really the whole thing. The transition happens ONCE...a settled promise can't go back to pending, which is kinda the whole reason promises are easier to reason about than raw callbacks.</a:t>
-            </a:r>
-            <a:endParaRPr/>
+            <a:r>
+              <a:t>Settles once, never back to pending.</a:t>
+            </a:r>
           </a:p>
         </p:txBody>
       </p:sp>
@@ -1129,20 +1118,9 @@
           </a:bodyPr>
           <a:lstStyle/>
           <a:p>
-            <a:pPr indent="0" lvl="0" marL="0" rtl="0" algn="l">
-              <a:spcBef>
-                <a:spcPts val="0"/>
-              </a:spcBef>
-              <a:spcAft>
-                <a:spcPts val="0"/>
-              </a:spcAft>
-              <a:buNone/>
-            </a:pPr>
-            <a:r>
-              <a:rPr lang="en-US"/>
-              <a:t>Show .then() once and really move on. Students WILL see it in legacy code, in documentation, in Stack Overflow answers and in whatever their coding agent pastes in from 2018, so they need to recognize it...but we're not going to write it ourselves. Walk through the chain briefly, one beat per line, and point out that each .then() returns a new promise for the next step.</a:t>
-            </a:r>
-            <a:endParaRPr/>
+            <a:r>
+              <a:t>Recognize only, we won't write it. Each .then() returns a new promise.</a:t>
+            </a:r>
           </a:p>
         </p:txBody>
       </p:sp>
@@ -1280,20 +1258,9 @@
           </a:bodyPr>
           <a:lstStyle/>
           <a:p>
-            <a:pPr indent="0" lvl="0" marL="0" rtl="0" algn="l">
-              <a:spcBef>
-                <a:spcPts val="0"/>
-              </a:spcBef>
-              <a:spcAft>
-                <a:spcPts val="0"/>
-              </a:spcAft>
-              <a:buNone/>
-            </a:pPr>
-            <a:r>
-              <a:rPr lang="en-US"/>
-              <a:t>Show .then() once and really move on. Students WILL see it in legacy code, in documentation, in Stack Overflow answers and in whatever their coding agent pastes in from 2018, so they need to recognize it...but we're not going to write it ourselves. Walk through the chain briefly, one beat per line, and point out that each .then() returns a new promise for the next step.</a:t>
-            </a:r>
-            <a:endParaRPr/>
+            <a:r>
+              <a:t>Recognize only, we won't write it. Each .then() returns a new promise.</a:t>
+            </a:r>
           </a:p>
         </p:txBody>
       </p:sp>
@@ -1431,20 +1398,9 @@
           </a:bodyPr>
           <a:lstStyle/>
           <a:p>
-            <a:pPr indent="0" lvl="0" marL="0" rtl="0" algn="l">
-              <a:spcBef>
-                <a:spcPts val="0"/>
-              </a:spcBef>
-              <a:spcAft>
-                <a:spcPts val="0"/>
-              </a:spcAft>
-              <a:buNone/>
-            </a:pPr>
-            <a:r>
-              <a:rPr lang="en-US"/>
-              <a:t>Show .then() once and really move on. Students WILL see it in legacy code, in documentation, in Stack Overflow answers and in whatever their coding agent pastes in from 2018, so they need to recognize it...but we're not going to write it ourselves. Walk through the chain briefly, one beat per line, and point out that each .then() returns a new promise for the next step.</a:t>
-            </a:r>
-            <a:endParaRPr/>
+            <a:r>
+              <a:t>Recognize only, we won't write it. Each .then() returns a new promise.</a:t>
+            </a:r>
           </a:p>
         </p:txBody>
       </p:sp>
@@ -1582,20 +1538,9 @@
           </a:bodyPr>
           <a:lstStyle/>
           <a:p>
-            <a:pPr indent="0" lvl="0" marL="0" rtl="0" algn="l">
-              <a:spcBef>
-                <a:spcPts val="0"/>
-              </a:spcBef>
-              <a:spcAft>
-                <a:spcPts val="0"/>
-              </a:spcAft>
-              <a:buNone/>
-            </a:pPr>
-            <a:r>
-              <a:rPr lang="en-US"/>
-              <a:t>Show .then() once and really move on. Students WILL see it in legacy code, in documentation, in Stack Overflow answers and in whatever their coding agent pastes in from 2018, so they need to recognize it...but we're not going to write it ourselves. Walk through the chain briefly, one beat per line, and point out that each .then() returns a new promise for the next step.</a:t>
-            </a:r>
-            <a:endParaRPr/>
+            <a:r>
+              <a:t>Recognize only, we won't write it. Each .then() returns a new promise.</a:t>
+            </a:r>
           </a:p>
         </p:txBody>
       </p:sp>
@@ -1733,20 +1678,9 @@
           </a:bodyPr>
           <a:lstStyle/>
           <a:p>
-            <a:pPr indent="0" lvl="0" marL="0" rtl="0" algn="l">
-              <a:spcBef>
-                <a:spcPts val="0"/>
-              </a:spcBef>
-              <a:spcAft>
-                <a:spcPts val="0"/>
-              </a:spcAft>
-              <a:buNone/>
-            </a:pPr>
-            <a:r>
-              <a:rPr lang="en-US"/>
-              <a:t>Students don't really need the exact failure modes of long .then() chains. What they need is to know that async/await exists because .then() got painful in practice, and that we're picking the modern tool because it's just nicer to read. If a student asks why the old API is still around, the honest answer is 'the language can't delete things', which is kinda a nice moment for that lesson too.</a:t>
-            </a:r>
-            <a:endParaRPr/>
+            <a:r>
+              <a:t>If asked why .then() still exists: the language can't delete things.</a:t>
+            </a:r>
           </a:p>
         </p:txBody>
       </p:sp>
@@ -1883,22 +1817,7 @@
             <a:noAutofit/>
           </a:bodyPr>
           <a:lstStyle/>
-          <a:p>
-            <a:pPr indent="0" lvl="0" marL="0" rtl="0" algn="l">
-              <a:spcBef>
-                <a:spcPts val="0"/>
-              </a:spcBef>
-              <a:spcAft>
-                <a:spcPts val="0"/>
-              </a:spcAft>
-              <a:buNone/>
-            </a:pPr>
-            <a:r>
-              <a:rPr lang="en-US"/>
-              <a:t>The readable syntax. A handful of rules, a side-by-side, and then a clarification about what await is actually doing underneath, which is the thing students most often get wrong.</a:t>
-            </a:r>
-            <a:endParaRPr/>
-          </a:p>
+          <a:p/>
         </p:txBody>
       </p:sp>
       <p:sp>
@@ -2035,215 +1954,9 @@
           </a:bodyPr>
           <a:lstStyle/>
           <a:p>
-            <a:pPr indent="0" lvl="0" marL="0" rtl="0" algn="l">
-              <a:spcBef>
-                <a:spcPts val="0"/>
-              </a:spcBef>
-              <a:spcAft>
-                <a:spcPts val="0"/>
-              </a:spcAft>
-              <a:buNone/>
-            </a:pPr>
-            <a:r>
-              <a:rPr lang="en-US"/>
-              <a:t>These rules are worth memorizing, because most of the confusion around async/await comes from quietly violating one of them - and the most common mistake by a mile is forgetting rule 3 and trying to await something inside a function that was never declared async. The error message when you do this is actually pretty clear, which is kinda rare in JavaScript, so push your coding agent to read it instead of guessing.</a:t>
-            </a:r>
-            <a:endParaRPr/>
-          </a:p>
-          <a:p>
-            <a:pPr indent="0" lvl="0" marL="0" rtl="0" algn="l">
-              <a:spcBef>
-                <a:spcPts val="0"/>
-              </a:spcBef>
-              <a:spcAft>
-                <a:spcPts val="0"/>
-              </a:spcAft>
-              <a:buNone/>
-            </a:pPr>
-            <a:r>
-              <a:t/>
-            </a:r>
-            <a:endParaRPr/>
-          </a:p>
-          <a:p>
-            <a:pPr indent="0" lvl="0" marL="0" rtl="0" algn="l">
-              <a:spcBef>
-                <a:spcPts val="0"/>
-              </a:spcBef>
-              <a:spcAft>
-                <a:spcPts val="0"/>
-              </a:spcAft>
-              <a:buNone/>
-            </a:pPr>
-            <a:r>
-              <a:rPr lang="en-US" sz="1100">
-                <a:solidFill>
-                  <a:srgbClr val="2B303B"/>
-                </a:solidFill>
-              </a:rPr>
-              <a:t>(</a:t>
-            </a:r>
-            <a:r>
-              <a:rPr lang="en-US" sz="1100">
-                <a:solidFill>
-                  <a:srgbClr val="8100C2"/>
-                </a:solidFill>
-              </a:rPr>
-              <a:t>async</a:t>
-            </a:r>
-            <a:r>
-              <a:rPr lang="en-US" sz="1100">
-                <a:solidFill>
-                  <a:schemeClr val="dk1"/>
-                </a:solidFill>
-              </a:rPr>
-              <a:t> </a:t>
-            </a:r>
-            <a:r>
-              <a:rPr lang="en-US" sz="1100">
-                <a:solidFill>
-                  <a:srgbClr val="2B303B"/>
-                </a:solidFill>
-              </a:rPr>
-              <a:t>()</a:t>
-            </a:r>
-            <a:r>
-              <a:rPr lang="en-US" sz="1100">
-                <a:solidFill>
-                  <a:schemeClr val="dk1"/>
-                </a:solidFill>
-              </a:rPr>
-              <a:t> </a:t>
-            </a:r>
-            <a:r>
-              <a:rPr lang="en-US" sz="1100">
-                <a:solidFill>
-                  <a:srgbClr val="14181F"/>
-                </a:solidFill>
-              </a:rPr>
-              <a:t>=&gt;</a:t>
-            </a:r>
-            <a:r>
-              <a:rPr lang="en-US" sz="1100">
-                <a:solidFill>
-                  <a:schemeClr val="dk1"/>
-                </a:solidFill>
-              </a:rPr>
-              <a:t> </a:t>
-            </a:r>
-            <a:r>
-              <a:rPr lang="en-US" sz="1100">
-                <a:solidFill>
-                  <a:srgbClr val="2B303B"/>
-                </a:solidFill>
-              </a:rPr>
-              <a:t>{</a:t>
-            </a:r>
-            <a:r>
-              <a:rPr lang="en-US" sz="1100">
-                <a:solidFill>
-                  <a:schemeClr val="dk1"/>
-                </a:solidFill>
-              </a:rPr>
-              <a:t> </a:t>
-            </a:r>
-            <a:r>
-              <a:rPr lang="en-US" sz="1100">
-                <a:solidFill>
-                  <a:srgbClr val="8100C2"/>
-                </a:solidFill>
-              </a:rPr>
-              <a:t>const</a:t>
-            </a:r>
-            <a:r>
-              <a:rPr lang="en-US" sz="1100">
-                <a:solidFill>
-                  <a:schemeClr val="dk1"/>
-                </a:solidFill>
-              </a:rPr>
-              <a:t> data </a:t>
-            </a:r>
-            <a:r>
-              <a:rPr lang="en-US" sz="1100">
-                <a:solidFill>
-                  <a:srgbClr val="14181F"/>
-                </a:solidFill>
-              </a:rPr>
-              <a:t>=</a:t>
-            </a:r>
-            <a:r>
-              <a:rPr lang="en-US" sz="1100">
-                <a:solidFill>
-                  <a:schemeClr val="dk1"/>
-                </a:solidFill>
-              </a:rPr>
-              <a:t> </a:t>
-            </a:r>
-            <a:r>
-              <a:rPr lang="en-US" sz="1100">
-                <a:solidFill>
-                  <a:srgbClr val="8100C2"/>
-                </a:solidFill>
-              </a:rPr>
-              <a:t>await</a:t>
-            </a:r>
-            <a:r>
-              <a:rPr lang="en-US" sz="1100">
-                <a:solidFill>
-                  <a:schemeClr val="dk1"/>
-                </a:solidFill>
-              </a:rPr>
-              <a:t> </a:t>
-            </a:r>
-            <a:r>
-              <a:rPr lang="en-US" sz="1100">
-                <a:solidFill>
-                  <a:srgbClr val="0051C2"/>
-                </a:solidFill>
-              </a:rPr>
-              <a:t>fetch</a:t>
-            </a:r>
-            <a:r>
-              <a:rPr lang="en-US" sz="1100">
-                <a:solidFill>
-                  <a:srgbClr val="2B303B"/>
-                </a:solidFill>
-              </a:rPr>
-              <a:t>(</a:t>
-            </a:r>
-            <a:r>
-              <a:rPr lang="en-US" sz="1100">
-                <a:solidFill>
-                  <a:srgbClr val="008000"/>
-                </a:solidFill>
-              </a:rPr>
-              <a:t>"/api/x"</a:t>
-            </a:r>
-            <a:r>
-              <a:rPr lang="en-US" sz="1100">
-                <a:solidFill>
-                  <a:srgbClr val="2B303B"/>
-                </a:solidFill>
-              </a:rPr>
-              <a:t>);</a:t>
-            </a:r>
-            <a:r>
-              <a:rPr lang="en-US" sz="1100">
-                <a:solidFill>
-                  <a:schemeClr val="dk1"/>
-                </a:solidFill>
-              </a:rPr>
-              <a:t> </a:t>
-            </a:r>
-            <a:r>
-              <a:rPr lang="en-US" sz="1100">
-                <a:solidFill>
-                  <a:srgbClr val="2B303B"/>
-                </a:solidFill>
-              </a:rPr>
-              <a:t>})(); &lt;- legal syntax</a:t>
-            </a:r>
-            <a:endParaRPr/>
+            <a:r>
+              <a:t>Rule 3 workaround: `(async () =&gt; { ... })()`. Error message is clear.</a:t>
+            </a:r>
           </a:p>
         </p:txBody>
       </p:sp>
@@ -2381,215 +2094,9 @@
           </a:bodyPr>
           <a:lstStyle/>
           <a:p>
-            <a:pPr indent="0" lvl="0" marL="0" rtl="0" algn="l">
-              <a:spcBef>
-                <a:spcPts val="0"/>
-              </a:spcBef>
-              <a:spcAft>
-                <a:spcPts val="0"/>
-              </a:spcAft>
-              <a:buNone/>
-            </a:pPr>
-            <a:r>
-              <a:rPr lang="en-US"/>
-              <a:t>These rules are worth memorizing, because most of the confusion around async/await comes from quietly violating one of them - and the most common mistake by a mile is forgetting rule 3 and trying to await something inside a function that was never declared async. The error message when you do this is actually pretty clear, which is kinda rare in JavaScript, so push your coding agent to read it instead of guessing.</a:t>
-            </a:r>
-            <a:endParaRPr/>
-          </a:p>
-          <a:p>
-            <a:pPr indent="0" lvl="0" marL="0" rtl="0" algn="l">
-              <a:spcBef>
-                <a:spcPts val="0"/>
-              </a:spcBef>
-              <a:spcAft>
-                <a:spcPts val="0"/>
-              </a:spcAft>
-              <a:buNone/>
-            </a:pPr>
-            <a:r>
-              <a:t/>
-            </a:r>
-            <a:endParaRPr/>
-          </a:p>
-          <a:p>
-            <a:pPr indent="0" lvl="0" marL="0" rtl="0" algn="l">
-              <a:spcBef>
-                <a:spcPts val="0"/>
-              </a:spcBef>
-              <a:spcAft>
-                <a:spcPts val="0"/>
-              </a:spcAft>
-              <a:buNone/>
-            </a:pPr>
-            <a:r>
-              <a:rPr lang="en-US" sz="1100">
-                <a:solidFill>
-                  <a:srgbClr val="2B303B"/>
-                </a:solidFill>
-              </a:rPr>
-              <a:t>(</a:t>
-            </a:r>
-            <a:r>
-              <a:rPr lang="en-US" sz="1100">
-                <a:solidFill>
-                  <a:srgbClr val="8100C2"/>
-                </a:solidFill>
-              </a:rPr>
-              <a:t>async</a:t>
-            </a:r>
-            <a:r>
-              <a:rPr lang="en-US" sz="1100">
-                <a:solidFill>
-                  <a:schemeClr val="dk1"/>
-                </a:solidFill>
-              </a:rPr>
-              <a:t> </a:t>
-            </a:r>
-            <a:r>
-              <a:rPr lang="en-US" sz="1100">
-                <a:solidFill>
-                  <a:srgbClr val="2B303B"/>
-                </a:solidFill>
-              </a:rPr>
-              <a:t>()</a:t>
-            </a:r>
-            <a:r>
-              <a:rPr lang="en-US" sz="1100">
-                <a:solidFill>
-                  <a:schemeClr val="dk1"/>
-                </a:solidFill>
-              </a:rPr>
-              <a:t> </a:t>
-            </a:r>
-            <a:r>
-              <a:rPr lang="en-US" sz="1100">
-                <a:solidFill>
-                  <a:srgbClr val="14181F"/>
-                </a:solidFill>
-              </a:rPr>
-              <a:t>=&gt;</a:t>
-            </a:r>
-            <a:r>
-              <a:rPr lang="en-US" sz="1100">
-                <a:solidFill>
-                  <a:schemeClr val="dk1"/>
-                </a:solidFill>
-              </a:rPr>
-              <a:t> </a:t>
-            </a:r>
-            <a:r>
-              <a:rPr lang="en-US" sz="1100">
-                <a:solidFill>
-                  <a:srgbClr val="2B303B"/>
-                </a:solidFill>
-              </a:rPr>
-              <a:t>{</a:t>
-            </a:r>
-            <a:r>
-              <a:rPr lang="en-US" sz="1100">
-                <a:solidFill>
-                  <a:schemeClr val="dk1"/>
-                </a:solidFill>
-              </a:rPr>
-              <a:t> </a:t>
-            </a:r>
-            <a:r>
-              <a:rPr lang="en-US" sz="1100">
-                <a:solidFill>
-                  <a:srgbClr val="8100C2"/>
-                </a:solidFill>
-              </a:rPr>
-              <a:t>const</a:t>
-            </a:r>
-            <a:r>
-              <a:rPr lang="en-US" sz="1100">
-                <a:solidFill>
-                  <a:schemeClr val="dk1"/>
-                </a:solidFill>
-              </a:rPr>
-              <a:t> data </a:t>
-            </a:r>
-            <a:r>
-              <a:rPr lang="en-US" sz="1100">
-                <a:solidFill>
-                  <a:srgbClr val="14181F"/>
-                </a:solidFill>
-              </a:rPr>
-              <a:t>=</a:t>
-            </a:r>
-            <a:r>
-              <a:rPr lang="en-US" sz="1100">
-                <a:solidFill>
-                  <a:schemeClr val="dk1"/>
-                </a:solidFill>
-              </a:rPr>
-              <a:t> </a:t>
-            </a:r>
-            <a:r>
-              <a:rPr lang="en-US" sz="1100">
-                <a:solidFill>
-                  <a:srgbClr val="8100C2"/>
-                </a:solidFill>
-              </a:rPr>
-              <a:t>await</a:t>
-            </a:r>
-            <a:r>
-              <a:rPr lang="en-US" sz="1100">
-                <a:solidFill>
-                  <a:schemeClr val="dk1"/>
-                </a:solidFill>
-              </a:rPr>
-              <a:t> </a:t>
-            </a:r>
-            <a:r>
-              <a:rPr lang="en-US" sz="1100">
-                <a:solidFill>
-                  <a:srgbClr val="0051C2"/>
-                </a:solidFill>
-              </a:rPr>
-              <a:t>fetch</a:t>
-            </a:r>
-            <a:r>
-              <a:rPr lang="en-US" sz="1100">
-                <a:solidFill>
-                  <a:srgbClr val="2B303B"/>
-                </a:solidFill>
-              </a:rPr>
-              <a:t>(</a:t>
-            </a:r>
-            <a:r>
-              <a:rPr lang="en-US" sz="1100">
-                <a:solidFill>
-                  <a:srgbClr val="008000"/>
-                </a:solidFill>
-              </a:rPr>
-              <a:t>"/api/x"</a:t>
-            </a:r>
-            <a:r>
-              <a:rPr lang="en-US" sz="1100">
-                <a:solidFill>
-                  <a:srgbClr val="2B303B"/>
-                </a:solidFill>
-              </a:rPr>
-              <a:t>);</a:t>
-            </a:r>
-            <a:r>
-              <a:rPr lang="en-US" sz="1100">
-                <a:solidFill>
-                  <a:schemeClr val="dk1"/>
-                </a:solidFill>
-              </a:rPr>
-              <a:t> </a:t>
-            </a:r>
-            <a:r>
-              <a:rPr lang="en-US" sz="1100">
-                <a:solidFill>
-                  <a:srgbClr val="2B303B"/>
-                </a:solidFill>
-              </a:rPr>
-              <a:t>})(); &lt;- legal syntax</a:t>
-            </a:r>
-            <a:endParaRPr/>
+            <a:r>
+              <a:t>Rule 3 workaround: `(async () =&gt; { ... })()`. Error message is clear.</a:t>
+            </a:r>
           </a:p>
         </p:txBody>
       </p:sp>
@@ -2727,215 +2234,9 @@
           </a:bodyPr>
           <a:lstStyle/>
           <a:p>
-            <a:pPr indent="0" lvl="0" marL="0" rtl="0" algn="l">
-              <a:spcBef>
-                <a:spcPts val="0"/>
-              </a:spcBef>
-              <a:spcAft>
-                <a:spcPts val="0"/>
-              </a:spcAft>
-              <a:buNone/>
-            </a:pPr>
-            <a:r>
-              <a:rPr lang="en-US"/>
-              <a:t>These rules are worth memorizing, because most of the confusion around async/await comes from quietly violating one of them - and the most common mistake by a mile is forgetting rule 3 and trying to await something inside a function that was never declared async. The error message when you do this is actually pretty clear, which is kinda rare in JavaScript, so push your coding agent to read it instead of guessing.</a:t>
-            </a:r>
-            <a:endParaRPr/>
-          </a:p>
-          <a:p>
-            <a:pPr indent="0" lvl="0" marL="0" rtl="0" algn="l">
-              <a:spcBef>
-                <a:spcPts val="0"/>
-              </a:spcBef>
-              <a:spcAft>
-                <a:spcPts val="0"/>
-              </a:spcAft>
-              <a:buNone/>
-            </a:pPr>
-            <a:r>
-              <a:t/>
-            </a:r>
-            <a:endParaRPr/>
-          </a:p>
-          <a:p>
-            <a:pPr indent="0" lvl="0" marL="0" rtl="0" algn="l">
-              <a:spcBef>
-                <a:spcPts val="0"/>
-              </a:spcBef>
-              <a:spcAft>
-                <a:spcPts val="0"/>
-              </a:spcAft>
-              <a:buNone/>
-            </a:pPr>
-            <a:r>
-              <a:rPr lang="en-US" sz="1100">
-                <a:solidFill>
-                  <a:srgbClr val="2B303B"/>
-                </a:solidFill>
-              </a:rPr>
-              <a:t>(</a:t>
-            </a:r>
-            <a:r>
-              <a:rPr lang="en-US" sz="1100">
-                <a:solidFill>
-                  <a:srgbClr val="8100C2"/>
-                </a:solidFill>
-              </a:rPr>
-              <a:t>async</a:t>
-            </a:r>
-            <a:r>
-              <a:rPr lang="en-US" sz="1100">
-                <a:solidFill>
-                  <a:schemeClr val="dk1"/>
-                </a:solidFill>
-              </a:rPr>
-              <a:t> </a:t>
-            </a:r>
-            <a:r>
-              <a:rPr lang="en-US" sz="1100">
-                <a:solidFill>
-                  <a:srgbClr val="2B303B"/>
-                </a:solidFill>
-              </a:rPr>
-              <a:t>()</a:t>
-            </a:r>
-            <a:r>
-              <a:rPr lang="en-US" sz="1100">
-                <a:solidFill>
-                  <a:schemeClr val="dk1"/>
-                </a:solidFill>
-              </a:rPr>
-              <a:t> </a:t>
-            </a:r>
-            <a:r>
-              <a:rPr lang="en-US" sz="1100">
-                <a:solidFill>
-                  <a:srgbClr val="14181F"/>
-                </a:solidFill>
-              </a:rPr>
-              <a:t>=&gt;</a:t>
-            </a:r>
-            <a:r>
-              <a:rPr lang="en-US" sz="1100">
-                <a:solidFill>
-                  <a:schemeClr val="dk1"/>
-                </a:solidFill>
-              </a:rPr>
-              <a:t> </a:t>
-            </a:r>
-            <a:r>
-              <a:rPr lang="en-US" sz="1100">
-                <a:solidFill>
-                  <a:srgbClr val="2B303B"/>
-                </a:solidFill>
-              </a:rPr>
-              <a:t>{</a:t>
-            </a:r>
-            <a:r>
-              <a:rPr lang="en-US" sz="1100">
-                <a:solidFill>
-                  <a:schemeClr val="dk1"/>
-                </a:solidFill>
-              </a:rPr>
-              <a:t> </a:t>
-            </a:r>
-            <a:r>
-              <a:rPr lang="en-US" sz="1100">
-                <a:solidFill>
-                  <a:srgbClr val="8100C2"/>
-                </a:solidFill>
-              </a:rPr>
-              <a:t>const</a:t>
-            </a:r>
-            <a:r>
-              <a:rPr lang="en-US" sz="1100">
-                <a:solidFill>
-                  <a:schemeClr val="dk1"/>
-                </a:solidFill>
-              </a:rPr>
-              <a:t> data </a:t>
-            </a:r>
-            <a:r>
-              <a:rPr lang="en-US" sz="1100">
-                <a:solidFill>
-                  <a:srgbClr val="14181F"/>
-                </a:solidFill>
-              </a:rPr>
-              <a:t>=</a:t>
-            </a:r>
-            <a:r>
-              <a:rPr lang="en-US" sz="1100">
-                <a:solidFill>
-                  <a:schemeClr val="dk1"/>
-                </a:solidFill>
-              </a:rPr>
-              <a:t> </a:t>
-            </a:r>
-            <a:r>
-              <a:rPr lang="en-US" sz="1100">
-                <a:solidFill>
-                  <a:srgbClr val="8100C2"/>
-                </a:solidFill>
-              </a:rPr>
-              <a:t>await</a:t>
-            </a:r>
-            <a:r>
-              <a:rPr lang="en-US" sz="1100">
-                <a:solidFill>
-                  <a:schemeClr val="dk1"/>
-                </a:solidFill>
-              </a:rPr>
-              <a:t> </a:t>
-            </a:r>
-            <a:r>
-              <a:rPr lang="en-US" sz="1100">
-                <a:solidFill>
-                  <a:srgbClr val="0051C2"/>
-                </a:solidFill>
-              </a:rPr>
-              <a:t>fetch</a:t>
-            </a:r>
-            <a:r>
-              <a:rPr lang="en-US" sz="1100">
-                <a:solidFill>
-                  <a:srgbClr val="2B303B"/>
-                </a:solidFill>
-              </a:rPr>
-              <a:t>(</a:t>
-            </a:r>
-            <a:r>
-              <a:rPr lang="en-US" sz="1100">
-                <a:solidFill>
-                  <a:srgbClr val="008000"/>
-                </a:solidFill>
-              </a:rPr>
-              <a:t>"/api/x"</a:t>
-            </a:r>
-            <a:r>
-              <a:rPr lang="en-US" sz="1100">
-                <a:solidFill>
-                  <a:srgbClr val="2B303B"/>
-                </a:solidFill>
-              </a:rPr>
-              <a:t>);</a:t>
-            </a:r>
-            <a:r>
-              <a:rPr lang="en-US" sz="1100">
-                <a:solidFill>
-                  <a:schemeClr val="dk1"/>
-                </a:solidFill>
-              </a:rPr>
-              <a:t> </a:t>
-            </a:r>
-            <a:r>
-              <a:rPr lang="en-US" sz="1100">
-                <a:solidFill>
-                  <a:srgbClr val="2B303B"/>
-                </a:solidFill>
-              </a:rPr>
-              <a:t>})(); &lt;- legal syntax</a:t>
-            </a:r>
-            <a:endParaRPr/>
+            <a:r>
+              <a:t>Rule 3 workaround: `(async () =&gt; { ... })()`. Error message is clear.</a:t>
+            </a:r>
           </a:p>
         </p:txBody>
       </p:sp>
@@ -3073,20 +2374,9 @@
           </a:bodyPr>
           <a:lstStyle/>
           <a:p>
-            <a:pPr indent="0" lvl="0" marL="0" rtl="0" algn="l">
-              <a:spcBef>
-                <a:spcPts val="0"/>
-              </a:spcBef>
-              <a:spcAft>
-                <a:spcPts val="0"/>
-              </a:spcAft>
-              <a:buNone/>
-            </a:pPr>
-            <a:r>
-              <a:rPr lang="en-US"/>
-              <a:t>Forward reference to 5.2 explicitly flags that fetch is the third capability and brings async with it. Students should leave today knowing that next class is about WAITING, not about a new piece of syntax. That framing sets up the promises material really well. The rules of the road in the middle are the practical takeaways - feel free to repeat them at the top of 5.2 if it helps.</a:t>
-            </a:r>
-            <a:endParaRPr/>
+            <a:r>
+              <a:t>Recap only. Today's topic: code that waits.</a:t>
+            </a:r>
           </a:p>
         </p:txBody>
       </p:sp>
@@ -3224,20 +2514,9 @@
           </a:bodyPr>
           <a:lstStyle/>
           <a:p>
-            <a:pPr indent="0" lvl="0" marL="0" rtl="0" algn="l">
-              <a:spcBef>
-                <a:spcPts val="0"/>
-              </a:spcBef>
-              <a:spcAft>
-                <a:spcPts val="0"/>
-              </a:spcAft>
-              <a:buNone/>
-            </a:pPr>
-            <a:r>
-              <a:rPr lang="en-US"/>
-              <a:t>Students see the same logic two ways and immediately get why the bottom version wins. The `data` variable being in scope after the second await is probably the clearest ergonomic win to point at...the top version has to thread it through an inner closure, the bottom one just uses it.</a:t>
-            </a:r>
-            <a:endParaRPr/>
+            <a:r>
+              <a:t>Point at `data` staying in scope after the second await.</a:t>
+            </a:r>
           </a:p>
         </p:txBody>
       </p:sp>
@@ -3375,20 +2654,9 @@
           </a:bodyPr>
           <a:lstStyle/>
           <a:p>
-            <a:pPr indent="0" lvl="0" marL="0" rtl="0" algn="l">
-              <a:spcBef>
-                <a:spcPts val="0"/>
-              </a:spcBef>
-              <a:spcAft>
-                <a:spcPts val="0"/>
-              </a:spcAft>
-              <a:buNone/>
-            </a:pPr>
-            <a:r>
-              <a:rPr lang="en-US"/>
-              <a:t>Students see the same logic two ways and immediately get why the bottom version wins. The `data` variable being in scope after the second await is probably the clearest ergonomic win to point at...the top version has to thread it through an inner closure, the bottom one just uses it.</a:t>
-            </a:r>
-            <a:endParaRPr/>
+            <a:r>
+              <a:t>Point at `data` staying in scope after the second await.</a:t>
+            </a:r>
           </a:p>
         </p:txBody>
       </p:sp>
@@ -3526,20 +2794,9 @@
           </a:bodyPr>
           <a:lstStyle/>
           <a:p>
-            <a:pPr indent="0" lvl="0" marL="0" rtl="0" algn="l">
-              <a:spcBef>
-                <a:spcPts val="0"/>
-              </a:spcBef>
-              <a:spcAft>
-                <a:spcPts val="0"/>
-              </a:spcAft>
-              <a:buNone/>
-            </a:pPr>
-            <a:r>
-              <a:rPr lang="en-US"/>
-              <a:t>This is the mental model students most often get WRONG. They kinda think async just makes code asynchronous by some sort of magic. The truth is more specific - it pauses one function without blocking the shared UI thread, and that distinction matters a lot when they start debugging async code later, because a hung fetch doesn't hang the page, it just hangs the one function that's awaiting it.</a:t>
-            </a:r>
-            <a:endParaRPr/>
+            <a:r>
+              <a:t>Debugging angle: a hung fetch parks one function, page stays live.</a:t>
+            </a:r>
           </a:p>
         </p:txBody>
       </p:sp>
@@ -3677,19 +2934,9 @@
           </a:bodyPr>
           <a:lstStyle/>
           <a:p>
-            <a:pPr indent="0" lvl="0" marL="0" rtl="0" algn="l">
-              <a:spcBef>
-                <a:spcPts val="0"/>
-              </a:spcBef>
-              <a:spcAft>
-                <a:spcPts val="0"/>
-              </a:spcAft>
-              <a:buNone/>
-            </a:pPr>
-            <a:r>
-              <a:t/>
-            </a:r>
-            <a:endParaRPr/>
+            <a:r>
+              <a:t>Ask what happens if clicked twice before doWork finishes.</a:t>
+            </a:r>
           </a:p>
         </p:txBody>
       </p:sp>
@@ -3976,22 +3223,7 @@
             <a:noAutofit/>
           </a:bodyPr>
           <a:lstStyle/>
-          <a:p>
-            <a:pPr indent="0" lvl="0" marL="0" rtl="0" algn="l">
-              <a:spcBef>
-                <a:spcPts val="0"/>
-              </a:spcBef>
-              <a:spcAft>
-                <a:spcPts val="0"/>
-              </a:spcAft>
-              <a:buNone/>
-            </a:pPr>
-            <a:r>
-              <a:rPr lang="en-US"/>
-              <a:t>The real API. Now that students have the machinery, fetch stops being magic and starts being 'oh right, of course that's what it would look like.'</a:t>
-            </a:r>
-            <a:endParaRPr/>
-          </a:p>
+          <a:p/>
         </p:txBody>
       </p:sp>
       <p:sp>
@@ -4128,20 +3360,9 @@
           </a:bodyPr>
           <a:lstStyle/>
           <a:p>
-            <a:pPr indent="0" lvl="0" marL="0" rtl="0" algn="l">
-              <a:spcBef>
-                <a:spcPts val="0"/>
-              </a:spcBef>
-              <a:spcAft>
-                <a:spcPts val="0"/>
-              </a:spcAft>
-              <a:buNone/>
-            </a:pPr>
-            <a:r>
-              <a:rPr lang="en-US"/>
-              <a:t>Why two awaits? The HTTP protocol lets servers send headers first and then stream the body separately, so having two promises - one for 'headers arrived' and one for 'body finished' - really just matches what's happening on the wire. It confuses students the first time but it's one of those details that makes more sense the longer they sit with it.</a:t>
-            </a:r>
-            <a:endParaRPr/>
+            <a:r>
+              <a:t>Matches the wire: HTTP sends headers, then streams the body.</a:t>
+            </a:r>
           </a:p>
         </p:txBody>
       </p:sp>
@@ -4279,20 +3500,9 @@
           </a:bodyPr>
           <a:lstStyle/>
           <a:p>
-            <a:pPr indent="0" lvl="0" marL="0" rtl="0" algn="l">
-              <a:spcBef>
-                <a:spcPts val="0"/>
-              </a:spcBef>
-              <a:spcAft>
-                <a:spcPts val="0"/>
-              </a:spcAft>
-              <a:buNone/>
-            </a:pPr>
-            <a:r>
-              <a:rPr lang="en-US"/>
-              <a:t>Walk through the three steps: fetch, check status, parse body. The `response.ok` check is really the single most important line on this slide and the next slide explains why. Mention that `Message[]` is a TS type reference - in a real project they'd define the Message interface in a shared file and import it here.</a:t>
-            </a:r>
-            <a:endParaRPr/>
+            <a:r>
+              <a:t>`response.ok` gets its own slide later. `Message[]`: define the interface in a shared file.</a:t>
+            </a:r>
           </a:p>
         </p:txBody>
       </p:sp>
@@ -4430,20 +3640,9 @@
           </a:bodyPr>
           <a:lstStyle/>
           <a:p>
-            <a:pPr indent="0" lvl="0" marL="0" rtl="0" algn="l">
-              <a:spcBef>
-                <a:spcPts val="0"/>
-              </a:spcBef>
-              <a:spcAft>
-                <a:spcPts val="0"/>
-              </a:spcAft>
-              <a:buNone/>
-            </a:pPr>
-            <a:r>
-              <a:rPr lang="en-US"/>
-              <a:t>The options object is the second argument to fetch. Three keys really matter for POST: method, headers, and body. The body is a STRING - you have to JSON.stringify yourself, fetch won't do it for you. Content-Type tells the server you're sending JSON, and if you forget that header FastAPI won't parse the body as JSON and you'll get a 422...which is a super common gripe when students are wiring the frontend to the backend for the first time, so flag it now and save yourself the office hours.</a:t>
-            </a:r>
-            <a:endParaRPr/>
+            <a:r>
+              <a:t>Body is a string, stringify yourself. Missing Content-Type header gives a FastAPI 422.</a:t>
+            </a:r>
           </a:p>
         </p:txBody>
       </p:sp>
@@ -4581,20 +3780,9 @@
           </a:bodyPr>
           <a:lstStyle/>
           <a:p>
-            <a:pPr indent="0" lvl="0" marL="0" rtl="0" algn="l">
-              <a:spcBef>
-                <a:spcPts val="0"/>
-              </a:spcBef>
-              <a:spcAft>
-                <a:spcPts val="0"/>
-              </a:spcAft>
-              <a:buNone/>
-            </a:pPr>
-            <a:r>
-              <a:rPr lang="en-US"/>
-              <a:t>Students will get this wrong every single time if you don't spend real time on it. Every piece of fetch code in this lecture checks response.ok immediately after the first await, and students should internalize that as PART of the fetch pattern and not as some optional add-on. Push your coding agent on this too, it absolutely will skip the check if you let it.</a:t>
-            </a:r>
-            <a:endParaRPr/>
+            <a:r>
+              <a:t>`ok` means 200-299. Ask: so when does fetch throw? Check agent output for this.</a:t>
+            </a:r>
           </a:p>
         </p:txBody>
       </p:sp>
@@ -4731,22 +3919,7 @@
             <a:noAutofit/>
           </a:bodyPr>
           <a:lstStyle/>
-          <a:p>
-            <a:pPr indent="0" lvl="0" marL="0" rtl="0" algn="l">
-              <a:spcBef>
-                <a:spcPts val="0"/>
-              </a:spcBef>
-              <a:spcAft>
-                <a:spcPts val="0"/>
-              </a:spcAft>
-              <a:buNone/>
-            </a:pPr>
-            <a:r>
-              <a:rPr lang="en-US"/>
-              <a:t>Frame the problem before any syntax shows up, because a student who hasn't felt the problem has no reason to care about the solution.</a:t>
-            </a:r>
-            <a:endParaRPr/>
-          </a:p>
+          <a:p/>
         </p:txBody>
       </p:sp>
       <p:sp>
@@ -4883,76 +4056,9 @@
           </a:bodyPr>
           <a:lstStyle/>
           <a:p>
-            <a:pPr indent="0" lvl="0" marL="0" rtl="0" algn="l">
-              <a:spcBef>
-                <a:spcPts val="0"/>
-              </a:spcBef>
-              <a:spcAft>
-                <a:spcPts val="0"/>
-              </a:spcAft>
-              <a:buNone/>
-            </a:pPr>
-            <a:r>
-              <a:rPr lang="en-US"/>
-              <a:t>Every piece of fetch code in this lecture checks response.ok immediately after the first await, and you should internalize that as PART of the fetch pattern and not as some optional add-on. Push your coding agent on this too, it absolutely will skip the check if you let it.</a:t>
-            </a:r>
-            <a:endParaRPr/>
-          </a:p>
-          <a:p>
-            <a:pPr indent="0" lvl="0" marL="0" rtl="0" algn="l">
-              <a:spcBef>
-                <a:spcPts val="0"/>
-              </a:spcBef>
-              <a:spcAft>
-                <a:spcPts val="0"/>
-              </a:spcAft>
-              <a:buNone/>
-            </a:pPr>
-            <a:r>
-              <a:t/>
-            </a:r>
-            <a:endParaRPr/>
-          </a:p>
-          <a:p>
-            <a:pPr indent="0" lvl="0" marL="0" rtl="0" algn="l">
-              <a:spcBef>
-                <a:spcPts val="0"/>
-              </a:spcBef>
-              <a:spcAft>
-                <a:spcPts val="0"/>
-              </a:spcAft>
-              <a:buNone/>
-            </a:pPr>
-            <a:r>
-              <a:rPr lang="en-US" u="sng">
-                <a:solidFill>
-                  <a:schemeClr val="hlink"/>
-                </a:solidFill>
-                <a:hlinkClick r:id="rId2"/>
-              </a:rPr>
-              <a:t>response.ok</a:t>
-            </a:r>
-            <a:r>
-              <a:rPr lang="en-US"/>
-              <a:t> == status code 200-299</a:t>
-            </a:r>
-            <a:endParaRPr/>
-          </a:p>
-          <a:p>
-            <a:pPr indent="0" lvl="0" marL="0" rtl="0" algn="l">
-              <a:spcBef>
-                <a:spcPts val="0"/>
-              </a:spcBef>
-              <a:spcAft>
-                <a:spcPts val="0"/>
-              </a:spcAft>
-              <a:buNone/>
-            </a:pPr>
-            <a:r>
-              <a:rPr lang="en-US"/>
-              <a:t>So…why might fetch throw an exception then?</a:t>
-            </a:r>
-            <a:endParaRPr/>
+            <a:r>
+              <a:t>`ok` means 200-299. Ask: so when does fetch throw? Check agent output for this.</a:t>
+            </a:r>
           </a:p>
         </p:txBody>
       </p:sp>
@@ -5090,66 +4196,9 @@
           </a:bodyPr>
           <a:lstStyle/>
           <a:p>
-            <a:pPr indent="0" lvl="0" marL="0" rtl="0" algn="l">
-              <a:spcBef>
-                <a:spcPts val="0"/>
-              </a:spcBef>
-              <a:spcAft>
-                <a:spcPts val="0"/>
-              </a:spcAft>
-              <a:buNone/>
-            </a:pPr>
-            <a:r>
-              <a:rPr lang="en-US"/>
-              <a:t>Students will get this wrong every single time if you don't spend real time on it. Every piece of fetch code in this lecture checks response.ok immediately after the first await, and students should internalize that as PART of the fetch pattern and not as some optional add-on. Push your coding agent on this too, it absolutely will skip the check if you let it.</a:t>
-            </a:r>
-            <a:endParaRPr/>
-          </a:p>
-          <a:p>
-            <a:pPr indent="0" lvl="0" marL="0" rtl="0" algn="l">
-              <a:spcBef>
-                <a:spcPts val="0"/>
-              </a:spcBef>
-              <a:spcAft>
-                <a:spcPts val="0"/>
-              </a:spcAft>
-              <a:buNone/>
-            </a:pPr>
-            <a:r>
-              <a:t/>
-            </a:r>
-            <a:endParaRPr/>
-          </a:p>
-          <a:p>
-            <a:pPr indent="0" lvl="0" marL="0" rtl="0" algn="l">
-              <a:spcBef>
-                <a:spcPts val="0"/>
-              </a:spcBef>
-              <a:spcAft>
-                <a:spcPts val="0"/>
-              </a:spcAft>
-              <a:buNone/>
-            </a:pPr>
-            <a:r>
-              <a:rPr lang="en-US"/>
-              <a:t>This is the #1 reason fetch-using code has bugs in the wild.</a:t>
-            </a:r>
-            <a:endParaRPr/>
-          </a:p>
-          <a:p>
-            <a:pPr indent="0" lvl="0" marL="0" rtl="0" algn="l">
-              <a:spcBef>
-                <a:spcPts val="0"/>
-              </a:spcBef>
-              <a:spcAft>
-                <a:spcPts val="0"/>
-              </a:spcAft>
-              <a:buNone/>
-            </a:pPr>
-            <a:r>
-              <a:t/>
-            </a:r>
-            <a:endParaRPr/>
+            <a:r>
+              <a:t>`ok` means 200-299. Ask: so when does fetch throw? Check agent output for this.</a:t>
+            </a:r>
           </a:p>
         </p:txBody>
       </p:sp>
@@ -5287,20 +4336,9 @@
           </a:bodyPr>
           <a:lstStyle/>
           <a:p>
-            <a:pPr indent="0" lvl="0" marL="0" rtl="0" algn="l">
-              <a:spcBef>
-                <a:spcPts val="0"/>
-              </a:spcBef>
-              <a:spcAft>
-                <a:spcPts val="0"/>
-              </a:spcAft>
-              <a:buNone/>
-            </a:pPr>
-            <a:r>
-              <a:rPr lang="en-US"/>
-              <a:t>Students naturally think 'network error equals exception' and stop there, which is how you end up with code that silently ignores a 500 and tries to parse an error page as JSON. Making them name each failure mode out loud is what gets them writing code that handles the things, rather than code that hopes.</a:t>
-            </a:r>
-            <a:endParaRPr/>
+            <a:r>
+              <a:t>Ask for failure modes before showing each.</a:t>
+            </a:r>
           </a:p>
         </p:txBody>
       </p:sp>
@@ -5438,20 +4476,9 @@
           </a:bodyPr>
           <a:lstStyle/>
           <a:p>
-            <a:pPr indent="0" lvl="0" marL="0" rtl="0" algn="l">
-              <a:spcBef>
-                <a:spcPts val="0"/>
-              </a:spcBef>
-              <a:spcAft>
-                <a:spcPts val="0"/>
-              </a:spcAft>
-              <a:buNone/>
-            </a:pPr>
-            <a:r>
-              <a:rPr lang="en-US"/>
-              <a:t>Students naturally think 'network error equals exception' and stop there, which is how you end up with code that silently ignores a 500 and tries to parse an error page as JSON. Making them name each failure mode out loud is what gets them writing code that handles the things, rather than code that hopes.</a:t>
-            </a:r>
-            <a:endParaRPr/>
+            <a:r>
+              <a:t>Ask for failure modes before showing each.</a:t>
+            </a:r>
           </a:p>
         </p:txBody>
       </p:sp>
@@ -5589,20 +4616,9 @@
           </a:bodyPr>
           <a:lstStyle/>
           <a:p>
-            <a:pPr indent="0" lvl="0" marL="0" rtl="0" algn="l">
-              <a:spcBef>
-                <a:spcPts val="0"/>
-              </a:spcBef>
-              <a:spcAft>
-                <a:spcPts val="0"/>
-              </a:spcAft>
-              <a:buNone/>
-            </a:pPr>
-            <a:r>
-              <a:rPr lang="en-US"/>
-              <a:t>One try/catch handles all three failures. The ORDER matters here - the response.ok check has to happen before you try to parse the body, otherwise you're asking .json() to parse a 500 error page and it will not be happy. The catch block is where the real decisions live: logging, showing an error to the user, falling back to cached data, and so on. For this lecture we just return an empty array to keep it simple.</a:t>
-            </a:r>
-            <a:endParaRPr/>
+            <a:r>
+              <a:t>Order matters: `ok` check before `.json()`, or you parse an error page.</a:t>
+            </a:r>
           </a:p>
         </p:txBody>
       </p:sp>
@@ -5739,22 +4755,7 @@
             <a:noAutofit/>
           </a:bodyPr>
           <a:lstStyle/>
-          <a:p>
-            <a:pPr indent="0" lvl="0" marL="0" rtl="0" algn="l">
-              <a:spcBef>
-                <a:spcPts val="0"/>
-              </a:spcBef>
-              <a:spcAft>
-                <a:spcPts val="0"/>
-              </a:spcAft>
-              <a:buNone/>
-            </a:pPr>
-            <a:r>
-              <a:rPr lang="en-US"/>
-              <a:t>Race conditions. This is the new bug shape that async introduces and synchronous code can't have...really worth pausing on, because it's also the bug that catches students later in React. Two slides: one to feel the problem, one to handle it with AbortController.</a:t>
-            </a:r>
-            <a:endParaRPr/>
-          </a:p>
+          <a:p/>
         </p:txBody>
       </p:sp>
       <p:sp>
@@ -5891,20 +4892,9 @@
           </a:bodyPr>
           <a:lstStyle/>
           <a:p>
-            <a:pPr indent="0" lvl="0" marL="0" rtl="0" algn="l">
-              <a:spcBef>
-                <a:spcPts val="0"/>
-              </a:spcBef>
-              <a:spcAft>
-                <a:spcPts val="0"/>
-              </a:spcAft>
-              <a:buNone/>
-            </a:pPr>
-            <a:r>
-              <a:rPr lang="en-US"/>
-              <a:t>The first time students hit this in their own code they will SWEAR the bug is somewhere else, because the code looks right and there's no exception...the answers really did just come back in the wrong order. Spend a minute on the chat-filter scenario, draw the timeline on the board if you have to: t=0 click Active, t=1 click All, t=2 All returns, t=3 Active returns and clobbers it. Once they see the timeline the bug becomes obvious and the fix on the next slide makes immediate sense.</a:t>
-            </a:r>
-            <a:endParaRPr/>
+            <a:r>
+              <a:t>Draw the timeline: t0 Active, t1 All, t2 All returns, t3 Active clobbers.</a:t>
+            </a:r>
           </a:p>
         </p:txBody>
       </p:sp>
@@ -6042,20 +5032,9 @@
           </a:bodyPr>
           <a:lstStyle/>
           <a:p>
-            <a:pPr indent="0" lvl="0" marL="0" rtl="0" algn="l">
-              <a:spcBef>
-                <a:spcPts val="0"/>
-              </a:spcBef>
-              <a:spcAft>
-                <a:spcPts val="0"/>
-              </a:spcAft>
-              <a:buNone/>
-            </a:pPr>
-            <a:r>
-              <a:rPr lang="en-US"/>
-              <a:t>The first time students hit this in their own code they will SWEAR the bug is somewhere else, because the code looks right and there's no exception...the answers really did just come back in the wrong order. Spend a minute on the chat-filter scenario, draw the timeline on the board if you have to: t=0 click Active, t=1 click All, t=2 All returns, t=3 Active returns and clobbers it. Once they see the timeline the bug becomes obvious and the fix on the next slide makes immediate sense.</a:t>
-            </a:r>
-            <a:endParaRPr/>
+            <a:r>
+              <a:t>Draw the timeline: t0 Active, t1 All, t2 All returns, t3 Active clobbers.</a:t>
+            </a:r>
           </a:p>
         </p:txBody>
       </p:sp>
@@ -6193,20 +5172,9 @@
           </a:bodyPr>
           <a:lstStyle/>
           <a:p>
-            <a:pPr indent="0" lvl="0" marL="0" rtl="0" algn="l">
-              <a:spcBef>
-                <a:spcPts val="0"/>
-              </a:spcBef>
-              <a:spcAft>
-                <a:spcPts val="0"/>
-              </a:spcAft>
-              <a:buNone/>
-            </a:pPr>
-            <a:r>
-              <a:rPr lang="en-US"/>
-              <a:t>AbortController is the modern, idiomatic answer. It's also EXACTLY the pattern React's useEffect cleanup uses, which is a really nice forward-reference for next class - when they see useEffect returning a cleanup function, they'll recognize this. Walk through it: each new call aborts the previous controller, makes a fresh one, passes the signal into fetch, and the catch ignores AbortError because that rejection was on purpose. The alternative pattern, where you track a request id and ignore the stale responses, works fine too - AbortController just also saves you the network round trip on the way.</a:t>
-            </a:r>
-            <a:endParaRPr/>
+            <a:r>
+              <a:t>Same shape as React useEffect cleanup next class. Alternative: request id, ignore stale.</a:t>
+            </a:r>
           </a:p>
         </p:txBody>
       </p:sp>
@@ -6344,20 +5312,9 @@
           </a:bodyPr>
           <a:lstStyle/>
           <a:p>
-            <a:pPr indent="0" lvl="0" marL="0" rtl="0" algn="l">
-              <a:spcBef>
-                <a:spcPts val="0"/>
-              </a:spcBef>
-              <a:spcAft>
-                <a:spcPts val="0"/>
-              </a:spcAft>
-              <a:buNone/>
-            </a:pPr>
-            <a:r>
-              <a:rPr lang="en-US"/>
-              <a:t>AbortController is the modern, idiomatic answer. It's also EXACTLY the pattern React's useEffect cleanup uses, which is a really nice forward-reference for next class - when they see useEffect returning a cleanup function, they'll recognize this. Walk through it: each new call aborts the previous controller, makes a fresh one, passes the signal into fetch, and the catch ignores AbortError because that rejection was on purpose. The alternative pattern, where you track a request id and ignore the stale responses, works fine too - AbortController just also saves you the network round trip on the way.</a:t>
-            </a:r>
-            <a:endParaRPr/>
+            <a:r>
+              <a:t>Same shape as React useEffect cleanup next class. Alternative: request id, ignore stale.</a:t>
+            </a:r>
           </a:p>
         </p:txBody>
       </p:sp>
@@ -6495,20 +5452,9 @@
           </a:bodyPr>
           <a:lstStyle/>
           <a:p>
-            <a:pPr indent="0" lvl="0" marL="0" rtl="0" algn="l">
-              <a:spcBef>
-                <a:spcPts val="0"/>
-              </a:spcBef>
-              <a:spcAft>
-                <a:spcPts val="0"/>
-              </a:spcAft>
-              <a:buNone/>
-            </a:pPr>
-            <a:r>
-              <a:rPr lang="en-US"/>
-              <a:t>Call back to 5.1's 'three things' structure - students should feel like today is the natural next step and not some surprise topic. The timing argument matters...'microseconds' sets up the contrast, and 'or never' is really the scary case that motivates everything else. Dwell on 'never' for a beat, it does most of the work.</a:t>
-            </a:r>
-            <a:endParaRPr/>
+            <a:r>
+              <a:t>Contrast with function calls: microseconds. Pause on 'never'.</a:t>
+            </a:r>
           </a:p>
         </p:txBody>
       </p:sp>
@@ -6646,20 +5592,9 @@
           </a:bodyPr>
           <a:lstStyle/>
           <a:p>
-            <a:pPr indent="0" lvl="0" marL="0" rtl="0" algn="l">
-              <a:spcBef>
-                <a:spcPts val="0"/>
-              </a:spcBef>
-              <a:spcAft>
-                <a:spcPts val="0"/>
-              </a:spcAft>
-              <a:buNone/>
-            </a:pPr>
-            <a:r>
-              <a:rPr lang="en-US"/>
-              <a:t>AbortController is the modern, idiomatic answer. It's also EXACTLY the pattern React's useEffect cleanup uses, which is a really nice forward-reference for next class - when they see useEffect returning a cleanup function, they'll recognize this. Walk through it: each new call aborts the previous controller, makes a fresh one, passes the signal into fetch, and the catch ignores AbortError because that rejection was on purpose. The alternative pattern, where you track a request id and ignore the stale responses, works fine too - AbortController just also saves you the network round trip on the way.</a:t>
-            </a:r>
-            <a:endParaRPr/>
+            <a:r>
+              <a:t>Same shape as React useEffect cleanup next class. Alternative: request id, ignore stale.</a:t>
+            </a:r>
           </a:p>
         </p:txBody>
       </p:sp>
@@ -6797,135 +5732,9 @@
           </a:bodyPr>
           <a:lstStyle/>
           <a:p>
-            <a:pPr indent="0" lvl="0" marL="0" rtl="0" algn="l">
-              <a:spcBef>
-                <a:spcPts val="0"/>
-              </a:spcBef>
-              <a:spcAft>
-                <a:spcPts val="0"/>
-              </a:spcAft>
-              <a:buNone/>
-            </a:pPr>
-            <a:r>
-              <a:rPr lang="en-US"/>
-              <a:t>This exercise really ties together everything in the lecture - fetch, await, response.ok, response.json, DOM manipulation, error handling, all in one function. If a student can do this from scratch by the end of class, they're ready for React. The blanks are deliberately spaced so each one tests a distinct concept instead of just being a typing exercise.</a:t>
-            </a:r>
-            <a:endParaRPr/>
-          </a:p>
-          <a:p>
-            <a:pPr indent="0" lvl="0" marL="0" rtl="0" algn="l">
-              <a:spcBef>
-                <a:spcPts val="0"/>
-              </a:spcBef>
-              <a:spcAft>
-                <a:spcPts val="0"/>
-              </a:spcAft>
-              <a:buNone/>
-            </a:pPr>
-            <a:r>
-              <a:t/>
-            </a:r>
-            <a:endParaRPr/>
-          </a:p>
-          <a:p>
-            <a:pPr indent="0" lvl="0" marL="0" rtl="0" algn="l">
-              <a:spcBef>
-                <a:spcPts val="0"/>
-              </a:spcBef>
-              <a:spcAft>
-                <a:spcPts val="0"/>
-              </a:spcAft>
-              <a:buNone/>
-            </a:pPr>
-            <a:r>
-              <a:rPr lang="en-US"/>
-              <a:t>fetch</a:t>
-            </a:r>
-            <a:endParaRPr/>
-          </a:p>
-          <a:p>
-            <a:pPr indent="0" lvl="0" marL="0" rtl="0" algn="l">
-              <a:spcBef>
-                <a:spcPts val="0"/>
-              </a:spcBef>
-              <a:spcAft>
-                <a:spcPts val="0"/>
-              </a:spcAft>
-              <a:buNone/>
-            </a:pPr>
-            <a:r>
-              <a:rPr lang="en-US" u="sng">
-                <a:solidFill>
-                  <a:schemeClr val="hlink"/>
-                </a:solidFill>
-                <a:hlinkClick r:id="rId2"/>
-              </a:rPr>
-              <a:t>response.ok</a:t>
-            </a:r>
-            <a:endParaRPr/>
-          </a:p>
-          <a:p>
-            <a:pPr indent="0" lvl="0" marL="0" rtl="0" algn="l">
-              <a:spcBef>
-                <a:spcPts val="0"/>
-              </a:spcBef>
-              <a:spcAft>
-                <a:spcPts val="0"/>
-              </a:spcAft>
-              <a:buNone/>
-            </a:pPr>
-            <a:r>
-              <a:rPr lang="en-US"/>
-              <a:t>json()</a:t>
-            </a:r>
-            <a:endParaRPr/>
-          </a:p>
-          <a:p>
-            <a:pPr indent="0" lvl="0" marL="0" rtl="0" algn="l">
-              <a:spcBef>
-                <a:spcPts val="0"/>
-              </a:spcBef>
-              <a:spcAft>
-                <a:spcPts val="0"/>
-              </a:spcAft>
-              <a:buNone/>
-            </a:pPr>
-            <a:r>
-              <a:rPr lang="en-US"/>
-              <a:t>document.createElement(“li”)</a:t>
-            </a:r>
-            <a:endParaRPr/>
-          </a:p>
-          <a:p>
-            <a:pPr indent="0" lvl="0" marL="0" rtl="0" algn="l">
-              <a:spcBef>
-                <a:spcPts val="0"/>
-              </a:spcBef>
-              <a:spcAft>
-                <a:spcPts val="0"/>
-              </a:spcAft>
-              <a:buNone/>
-            </a:pPr>
-            <a:r>
-              <a:rPr lang="en-US"/>
-              <a:t>todo.title</a:t>
-            </a:r>
-            <a:endParaRPr/>
-          </a:p>
-          <a:p>
-            <a:pPr indent="0" lvl="0" marL="0" rtl="0" algn="l">
-              <a:spcBef>
-                <a:spcPts val="0"/>
-              </a:spcBef>
-              <a:spcAft>
-                <a:spcPts val="0"/>
-              </a:spcAft>
-              <a:buNone/>
-            </a:pPr>
-            <a:r>
-              <a:t/>
-            </a:r>
-            <a:endParaRPr/>
+            <a:r>
+              <a:t>Answers: fetch, !response.ok, json(), createElement("li"), todo.title, append.</a:t>
+            </a:r>
           </a:p>
         </p:txBody>
       </p:sp>
@@ -7063,20 +5872,9 @@
           </a:bodyPr>
           <a:lstStyle/>
           <a:p>
-            <a:pPr indent="0" lvl="0" marL="0" rtl="0" algn="l">
-              <a:spcBef>
-                <a:spcPts val="0"/>
-              </a:spcBef>
-              <a:spcAft>
-                <a:spcPts val="0"/>
-              </a:spcAft>
-              <a:buNone/>
-            </a:pPr>
-            <a:r>
-              <a:rPr lang="en-US"/>
-              <a:t>Walk through each filled-in blank: response.ok, response.json(), createElement, append, and style.display='block' to unhide the error div. Point out that this function really does zero work students haven't seen before...it's just the COMBINATION that's new, and that's true of most frontend code - the pieces are small, the compositions are where the complexity lives.</a:t>
-            </a:r>
-            <a:endParaRPr/>
+            <a:r>
+              <a:t>Only the combination is new.</a:t>
+            </a:r>
           </a:p>
         </p:txBody>
       </p:sp>
@@ -7214,109 +6012,9 @@
           </a:bodyPr>
           <a:lstStyle/>
           <a:p>
-            <a:pPr indent="0" lvl="0" marL="0" rtl="0" algn="l">
-              <a:spcBef>
-                <a:spcPts val="0"/>
-              </a:spcBef>
-              <a:spcAft>
-                <a:spcPts val="0"/>
-              </a:spcAft>
-              <a:buNone/>
-            </a:pPr>
-            <a:r>
-              <a:rPr lang="en-US"/>
-              <a:t>method: POST</a:t>
-            </a:r>
-            <a:endParaRPr/>
-          </a:p>
-          <a:p>
-            <a:pPr indent="0" lvl="0" marL="0" rtl="0" algn="l">
-              <a:spcBef>
-                <a:spcPts val="0"/>
-              </a:spcBef>
-              <a:spcAft>
-                <a:spcPts val="0"/>
-              </a:spcAft>
-              <a:buNone/>
-            </a:pPr>
-            <a:r>
-              <a:rPr lang="en-US"/>
-              <a:t>JSON.stringify</a:t>
-            </a:r>
-            <a:endParaRPr/>
-          </a:p>
-          <a:p>
-            <a:pPr indent="0" lvl="0" marL="0" rtl="0" algn="l">
-              <a:spcBef>
-                <a:spcPts val="0"/>
-              </a:spcBef>
-              <a:spcAft>
-                <a:spcPts val="0"/>
-              </a:spcAft>
-              <a:buNone/>
-            </a:pPr>
-            <a:r>
-              <a:rPr lang="en-US"/>
-              <a:t>!</a:t>
-            </a:r>
-            <a:r>
-              <a:rPr lang="en-US" u="sng">
-                <a:solidFill>
-                  <a:schemeClr val="hlink"/>
-                </a:solidFill>
-                <a:hlinkClick r:id="rId2"/>
-              </a:rPr>
-              <a:t>response.ok</a:t>
-            </a:r>
-            <a:endParaRPr/>
-          </a:p>
-          <a:p>
-            <a:pPr indent="0" lvl="0" marL="0" rtl="0" algn="l">
-              <a:spcBef>
-                <a:spcPts val="0"/>
-              </a:spcBef>
-              <a:spcAft>
-                <a:spcPts val="0"/>
-              </a:spcAft>
-              <a:buNone/>
-            </a:pPr>
-            <a:r>
-              <a:rPr lang="en-US"/>
-              <a:t>json()</a:t>
-            </a:r>
-            <a:endParaRPr/>
-          </a:p>
-          <a:p>
-            <a:pPr indent="0" lvl="0" marL="0" rtl="0" algn="l">
-              <a:spcBef>
-                <a:spcPts val="0"/>
-              </a:spcBef>
-              <a:spcAft>
-                <a:spcPts val="0"/>
-              </a:spcAft>
-              <a:buNone/>
-            </a:pPr>
-            <a:r>
-              <a:rPr lang="en-US"/>
-              <a:t>document.createElement(“li”)</a:t>
-            </a:r>
-            <a:endParaRPr/>
-          </a:p>
-          <a:p>
-            <a:pPr indent="0" lvl="0" marL="0" rtl="0" algn="l">
-              <a:spcBef>
-                <a:spcPts val="0"/>
-              </a:spcBef>
-              <a:spcAft>
-                <a:spcPts val="0"/>
-              </a:spcAft>
-              <a:buNone/>
-            </a:pPr>
-            <a:r>
-              <a:rPr lang="en-US"/>
-              <a:t>append</a:t>
-            </a:r>
-            <a:endParaRPr/>
+            <a:r>
+              <a:t>Answers: method "POST", JSON.stringify, !response.ok, json(), createElement("li"), append.</a:t>
+            </a:r>
           </a:p>
         </p:txBody>
       </p:sp>
@@ -7454,20 +6152,9 @@
           </a:bodyPr>
           <a:lstStyle/>
           <a:p>
-            <a:pPr indent="0" lvl="0" marL="0" rtl="0" algn="l">
-              <a:spcBef>
-                <a:spcPts val="0"/>
-              </a:spcBef>
-              <a:spcAft>
-                <a:spcPts val="0"/>
-              </a:spcAft>
-              <a:buNone/>
-            </a:pPr>
-            <a:r>
-              <a:rPr lang="en-US"/>
-              <a:t>Walk through the filled blanks in order: preventDefault, method, JSON.stringify, ok, json, append. Point out that we trust the server's returned object (`created.title`) rather than re-using `input.value`, because the server may have trimmed or normalized it - and definitely assigned it an id. That's a real production habit worth internalizing now: the source of truth for what got written is what the server SAYS got written, not what you sent.</a:t>
-            </a:r>
-            <a:endParaRPr/>
+            <a:r>
+              <a:t>Trust `created.title` over `input.value`: server may trim, assigns the id.</a:t>
+            </a:r>
           </a:p>
         </p:txBody>
       </p:sp>
@@ -7605,20 +6292,9 @@
           </a:bodyPr>
           <a:lstStyle/>
           <a:p>
-            <a:pPr indent="0" lvl="0" marL="0" rtl="0" algn="l">
-              <a:spcBef>
-                <a:spcPts val="0"/>
-              </a:spcBef>
-              <a:spcAft>
-                <a:spcPts val="0"/>
-              </a:spcAft>
-              <a:buNone/>
-            </a:pPr>
-            <a:r>
-              <a:rPr lang="en-US"/>
-              <a:t>Summary, recap, forward reference. The takeaways here are the ones they should be able to recite back at me by the end of class. The AbortController pattern from Section 6 is also the exact shape of useEffect cleanup, which is the strongest forward reference into 6.1: when they see a useEffect that returns a cleanup function, that's the same machinery they just learned. The re-render question is the OTHER hook for React - it's the ONE thing they had to solve manually today (just 'append an li' in the exercises), and React's whole value proposition is kinda doing that for you automatically.</a:t>
-            </a:r>
-            <a:endParaRPr/>
+            <a:r>
+              <a:t>AbortController is useEffect cleanup in 6.1. Re-render was the manual part today.</a:t>
+            </a:r>
           </a:p>
         </p:txBody>
       </p:sp>
@@ -7756,20 +6432,9 @@
           </a:bodyPr>
           <a:lstStyle/>
           <a:p>
-            <a:pPr indent="0" lvl="0" marL="0" rtl="0" algn="l">
-              <a:spcBef>
-                <a:spcPts val="0"/>
-              </a:spcBef>
-              <a:spcAft>
-                <a:spcPts val="0"/>
-              </a:spcAft>
-              <a:buNone/>
-            </a:pPr>
-            <a:r>
-              <a:rPr lang="en-US"/>
-              <a:t>Three manual updates for one state change. Walk through each - list rebuild, counter text, empty-state visibility - and then ask students to imagine an app with fifteen pieces of UI depending on the data instead of three. Every state change means remembering to touch every affected element, miss ONE and the UI silently lies about what the data says. This is kinda the canonical bug in vanilla-JS frontends and it's worth naming out loud.</a:t>
-            </a:r>
-            <a:endParaRPr/>
+            <a:r>
+              <a:t>Ask: imagine fifteen dependent elements instead of three. Miss one, UI is wrong.</a:t>
+            </a:r>
           </a:p>
         </p:txBody>
       </p:sp>
@@ -7907,20 +6572,9 @@
           </a:bodyPr>
           <a:lstStyle/>
           <a:p>
-            <a:pPr indent="0" lvl="0" marL="0" rtl="0" algn="l">
-              <a:spcBef>
-                <a:spcPts val="0"/>
-              </a:spcBef>
-              <a:spcAft>
-                <a:spcPts val="0"/>
-              </a:spcAft>
-              <a:buNone/>
-            </a:pPr>
-            <a:r>
-              <a:rPr lang="en-US"/>
-              <a:t>Summary, recap, forward reference. The takeaways here are the ones they should be able to recite back at me by the end of class. The AbortController pattern from Section 6 is also the exact shape of useEffect cleanup, which is the strongest forward reference into 6.1: when they see a useEffect that returns a cleanup function, that's the same machinery they just learned. The re-render question is the OTHER hook for React - it's the ONE thing they had to solve manually today (just 'append an li' in the exercises), and React's whole value proposition is kinda doing that for you automatically.</a:t>
-            </a:r>
-            <a:endParaRPr/>
+            <a:r>
+              <a:t>AbortController is useEffect cleanup in 6.1. Re-render was the manual part today.</a:t>
+            </a:r>
           </a:p>
         </p:txBody>
       </p:sp>
@@ -8058,20 +6712,9 @@
           </a:bodyPr>
           <a:lstStyle/>
           <a:p>
-            <a:pPr indent="0" lvl="0" marL="0" rtl="0" algn="l">
-              <a:spcBef>
-                <a:spcPts val="0"/>
-              </a:spcBef>
-              <a:spcAft>
-                <a:spcPts val="0"/>
-              </a:spcAft>
-              <a:buNone/>
-            </a:pPr>
-            <a:r>
-              <a:rPr lang="en-US"/>
-              <a:t>Call back to 5.1's 'three things' structure - students should feel like today is the natural next step and not some surprise topic. The timing argument matters...'microseconds' sets up the contrast, and 'or never' is really the scary case that motivates everything else. Dwell on 'never' for a beat, it does most of the work.</a:t>
-            </a:r>
-            <a:endParaRPr/>
+            <a:r>
+              <a:t>Contrast with function calls: microseconds. Pause on 'never'.</a:t>
+            </a:r>
           </a:p>
         </p:txBody>
       </p:sp>
@@ -8209,20 +6852,9 @@
           </a:bodyPr>
           <a:lstStyle/>
           <a:p>
-            <a:pPr indent="0" lvl="0" marL="0" rtl="0" algn="l">
-              <a:spcBef>
-                <a:spcPts val="0"/>
-              </a:spcBef>
-              <a:spcAft>
-                <a:spcPts val="0"/>
-              </a:spcAft>
-              <a:buNone/>
-            </a:pPr>
-            <a:r>
-              <a:rPr lang="en-US"/>
-              <a:t>The single-threaded nature of the browser is really why everything about async exists in the first place. If you could freely block the UI thread, you kinda wouldn't need promises at all...the whole rest of the lecture is built on avoiding this ONE problem, and it's worth saying that out loud.</a:t>
-            </a:r>
-            <a:endParaRPr/>
+            <a:r>
+              <a:t>One UI thread is why async exists. Optional aside: halting problem.</a:t>
+            </a:r>
           </a:p>
         </p:txBody>
       </p:sp>
@@ -8360,193 +6992,9 @@
           </a:bodyPr>
           <a:lstStyle/>
           <a:p>
-            <a:pPr indent="0" lvl="0" marL="0" rtl="0" algn="l">
-              <a:spcBef>
-                <a:spcPts val="0"/>
-              </a:spcBef>
-              <a:spcAft>
-                <a:spcPts val="0"/>
-              </a:spcAft>
-              <a:buNone/>
-            </a:pPr>
-            <a:r>
-              <a:rPr lang="en-US"/>
-              <a:t>The single-threaded nature of the browser is really why everything about async exists in the first place. If you could freely block the UI thread, you kinda wouldn't need promises at all...the whole rest of the lecture is built on avoiding this ONE problem, and it's worth saying that out loud.</a:t>
-            </a:r>
-            <a:endParaRPr/>
-          </a:p>
-          <a:p>
-            <a:pPr indent="0" lvl="0" marL="0" rtl="0" algn="l">
-              <a:spcBef>
-                <a:spcPts val="0"/>
-              </a:spcBef>
-              <a:spcAft>
-                <a:spcPts val="0"/>
-              </a:spcAft>
-              <a:buNone/>
-            </a:pPr>
-            <a:r>
-              <a:t/>
-            </a:r>
-            <a:endParaRPr/>
-          </a:p>
-          <a:p>
-            <a:pPr indent="0" lvl="0" marL="0" rtl="0" algn="l">
-              <a:spcBef>
-                <a:spcPts val="0"/>
-              </a:spcBef>
-              <a:spcAft>
-                <a:spcPts val="0"/>
-              </a:spcAft>
-              <a:buNone/>
-            </a:pPr>
-            <a:r>
-              <a:rPr lang="en-US"/>
-              <a:t>doesItHalt(fn, input) -&gt; bool:</a:t>
-            </a:r>
-            <a:endParaRPr/>
-          </a:p>
-          <a:p>
-            <a:pPr indent="0" lvl="0" marL="0" rtl="0" algn="l">
-              <a:spcBef>
-                <a:spcPts val="0"/>
-              </a:spcBef>
-              <a:spcAft>
-                <a:spcPts val="0"/>
-              </a:spcAft>
-              <a:buNone/>
-            </a:pPr>
-            <a:r>
-              <a:rPr lang="en-US"/>
-              <a:t>  …</a:t>
-            </a:r>
-            <a:endParaRPr/>
-          </a:p>
-          <a:p>
-            <a:pPr indent="0" lvl="0" marL="0" rtl="0" algn="l">
-              <a:spcBef>
-                <a:spcPts val="0"/>
-              </a:spcBef>
-              <a:spcAft>
-                <a:spcPts val="0"/>
-              </a:spcAft>
-              <a:buNone/>
-            </a:pPr>
-            <a:r>
-              <a:t/>
-            </a:r>
-            <a:endParaRPr/>
-          </a:p>
-          <a:p>
-            <a:pPr indent="0" lvl="0" marL="0" rtl="0" algn="l">
-              <a:spcBef>
-                <a:spcPts val="0"/>
-              </a:spcBef>
-              <a:spcAft>
-                <a:spcPts val="0"/>
-              </a:spcAft>
-              <a:buNone/>
-            </a:pPr>
-            <a:r>
-              <a:rPr lang="en-US"/>
-              <a:t>ifHaltLoop(fn, input):</a:t>
-            </a:r>
-            <a:endParaRPr/>
-          </a:p>
-          <a:p>
-            <a:pPr indent="0" lvl="0" marL="0" rtl="0" algn="l">
-              <a:spcBef>
-                <a:spcPts val="0"/>
-              </a:spcBef>
-              <a:spcAft>
-                <a:spcPts val="0"/>
-              </a:spcAft>
-              <a:buNone/>
-            </a:pPr>
-            <a:r>
-              <a:rPr lang="en-US"/>
-              <a:t>    if doesItHalt(fn, input):</a:t>
-            </a:r>
-            <a:endParaRPr/>
-          </a:p>
-          <a:p>
-            <a:pPr indent="0" lvl="0" marL="0" rtl="0" algn="l">
-              <a:spcBef>
-                <a:spcPts val="0"/>
-              </a:spcBef>
-              <a:spcAft>
-                <a:spcPts val="0"/>
-              </a:spcAft>
-              <a:buNone/>
-            </a:pPr>
-            <a:r>
-              <a:rPr lang="en-US"/>
-              <a:t>          while(True):</a:t>
-            </a:r>
-            <a:endParaRPr/>
-          </a:p>
-          <a:p>
-            <a:pPr indent="0" lvl="0" marL="0" rtl="0" algn="l">
-              <a:spcBef>
-                <a:spcPts val="0"/>
-              </a:spcBef>
-              <a:spcAft>
-                <a:spcPts val="0"/>
-              </a:spcAft>
-              <a:buNone/>
-            </a:pPr>
-            <a:r>
-              <a:rPr lang="en-US"/>
-              <a:t>   		pass</a:t>
-            </a:r>
-            <a:endParaRPr/>
-          </a:p>
-          <a:p>
-            <a:pPr indent="0" lvl="0" marL="0" rtl="0" algn="l">
-              <a:spcBef>
-                <a:spcPts val="0"/>
-              </a:spcBef>
-              <a:spcAft>
-                <a:spcPts val="0"/>
-              </a:spcAft>
-              <a:buNone/>
-            </a:pPr>
-            <a:r>
-              <a:rPr lang="en-US"/>
-              <a:t>    return 0</a:t>
-            </a:r>
-            <a:endParaRPr/>
-          </a:p>
-          <a:p>
-            <a:pPr indent="0" lvl="0" marL="0" rtl="0" algn="l">
-              <a:spcBef>
-                <a:spcPts val="0"/>
-              </a:spcBef>
-              <a:spcAft>
-                <a:spcPts val="0"/>
-              </a:spcAft>
-              <a:buNone/>
-            </a:pPr>
-            <a:r>
-              <a:t/>
-            </a:r>
-            <a:endParaRPr/>
-          </a:p>
-          <a:p>
-            <a:pPr indent="0" lvl="0" marL="0" rtl="0" algn="l">
-              <a:spcBef>
-                <a:spcPts val="0"/>
-              </a:spcBef>
-              <a:spcAft>
-                <a:spcPts val="0"/>
-              </a:spcAft>
-              <a:buNone/>
-            </a:pPr>
-            <a:r>
-              <a:rPr lang="en-US"/>
-              <a:t>doesItHalt(ifHaltLoop, (ifHaltLoop, ifHaltLoop))</a:t>
-            </a:r>
-            <a:endParaRPr/>
+            <a:r>
+              <a:t>One UI thread is why async exists. Optional aside: halting problem.</a:t>
+            </a:r>
           </a:p>
         </p:txBody>
       </p:sp>
@@ -8684,20 +7132,9 @@
           </a:bodyPr>
           <a:lstStyle/>
           <a:p>
-            <a:pPr indent="0" lvl="0" marL="0" rtl="0" algn="l">
-              <a:spcBef>
-                <a:spcPts val="0"/>
-              </a:spcBef>
-              <a:spcAft>
-                <a:spcPts val="0"/>
-              </a:spcAft>
-              <a:buNone/>
-            </a:pPr>
-            <a:r>
-              <a:rPr lang="en-US"/>
-              <a:t>Students will surface several reasonable ideas, and all of them kinda work: (a) CALLBACK - the caller passes in a function that the     fetcher calls with the result when it's ready. Closest     to what actually ended up happening in the language. (b) POLLING - return a handle, caller asks 'is it done     yet?' in a loop. Inefficient but functional. (c) EVENT - fire an event when ready, caller listens.     Really just callbacks via the event system. (d) OBJECT WITH STATE - return a box that starts empty     and fills in when the answer arrives. This is     basically a promise. Leave their answers on the board. The next section validates (d) as the shape JavaScript landed on, with (a) baked in as how you get notified when it settles.</a:t>
-            </a:r>
-            <a:endParaRPr/>
+            <a:r>
+              <a:t>Expect callback, polling, event, state-object. Leave on board; (d) is a promise, (a) is .then().</a:t>
+            </a:r>
           </a:p>
         </p:txBody>
       </p:sp>
@@ -8835,20 +7272,9 @@
           </a:bodyPr>
           <a:lstStyle/>
           <a:p>
-            <a:pPr indent="0" lvl="0" marL="0" rtl="0" algn="l">
-              <a:spcBef>
-                <a:spcPts val="0"/>
-              </a:spcBef>
-              <a:spcAft>
-                <a:spcPts val="0"/>
-              </a:spcAft>
-              <a:buNone/>
-            </a:pPr>
-            <a:r>
-              <a:rPr lang="en-US"/>
-              <a:t>Concept first, then the API. Really don't show .then() until the mental model is in place, otherwise students pattern-match on the syntax and miss the idea.</a:t>
-            </a:r>
-            <a:endParaRPr/>
+            <a:r>
+              <a:t>Concept before API; no .then() until the model is in place.</a:t>
+            </a:r>
           </a:p>
         </p:txBody>
       </p:sp>

--- a/lectures/Lecture 5.2 - Talking to Your Server.pptx
+++ b/lectures/Lecture 5.2 - Talking to Your Server.pptx
@@ -5736,6 +5736,17 @@
               <a:t>Answers: fetch, !response.ok, json(), createElement("li"), todo.title, append.</a:t>
             </a:r>
           </a:p>
+          <a:p/>
+          <a:p>
+            <a:r>
+              <a:t>json()</a:t>
+            </a:r>
+          </a:p>
+          <a:p>
+            <a:r>
+              <a:t>document.createElement(“li”)</a:t>
+            </a:r>
+          </a:p>
         </p:txBody>
       </p:sp>
       <p:sp>
@@ -6016,6 +6027,32 @@
               <a:t>Answers: method "POST", JSON.stringify, !response.ok, json(), createElement("li"), append.</a:t>
             </a:r>
           </a:p>
+          <a:p/>
+          <a:p>
+            <a:r>
+              <a:t>method: POST</a:t>
+            </a:r>
+          </a:p>
+          <a:p>
+            <a:r>
+              <a:t>JSON.stringify</a:t>
+            </a:r>
+          </a:p>
+          <a:p>
+            <a:r>
+              <a:t>!response.ok</a:t>
+            </a:r>
+          </a:p>
+          <a:p>
+            <a:r>
+              <a:t>json()</a:t>
+            </a:r>
+          </a:p>
+          <a:p>
+            <a:r>
+              <a:t>document.createElement(“li”)</a:t>
+            </a:r>
+          </a:p>
         </p:txBody>
       </p:sp>
       <p:sp>
@@ -6994,6 +7031,33 @@
           <a:p>
             <a:r>
               <a:t>One UI thread is why async exists. Optional aside: halting problem.</a:t>
+            </a:r>
+          </a:p>
+          <a:p/>
+          <a:p>
+            <a:r>
+              <a:t>    if doesItHalt(fn, input):</a:t>
+            </a:r>
+          </a:p>
+          <a:p>
+            <a:r>
+              <a:t>          while(True):</a:t>
+            </a:r>
+          </a:p>
+          <a:p>
+            <a:r>
+              <a:t>   		pass</a:t>
+            </a:r>
+          </a:p>
+          <a:p>
+            <a:r>
+              <a:t>    return 0</a:t>
+            </a:r>
+          </a:p>
+          <a:p/>
+          <a:p>
+            <a:r>
+              <a:t>doesItHalt(ifHaltLoop, (ifHaltLoop, ifHaltLoop))</a:t>
             </a:r>
           </a:p>
         </p:txBody>
